--- a/WebServerPrezentace.pptx
+++ b/WebServerPrezentace.pptx
@@ -358,7 +358,7 @@
             <a:pPr indent="0" algn="r">
               <a:buNone/>
             </a:pPr>
-            <a:fld id="{9B72EF71-3F83-4719-BD66-0DACFA9B6ABA}" type="slidenum">
+            <a:fld id="{A6C047AB-5D8C-4271-B78F-B82CB9002907}" type="slidenum">
               <a:rPr b="0" lang="cs-CZ" sz="1400" spc="-1" strike="noStrike">
                 <a:solidFill>
                   <a:srgbClr val="000000"/>
@@ -401,7 +401,7 @@
       </p:grpSpPr>
       <p:sp>
         <p:nvSpPr>
-          <p:cNvPr id="199" name="PlaceHolder 1"/>
+          <p:cNvPr id="201" name="PlaceHolder 1"/>
           <p:cNvSpPr>
             <a:spLocks noGrp="1"/>
           </p:cNvSpPr>
@@ -424,7 +424,7 @@
       </p:sp>
       <p:sp>
         <p:nvSpPr>
-          <p:cNvPr id="200" name="PlaceHolder 2"/>
+          <p:cNvPr id="202" name="PlaceHolder 2"/>
           <p:cNvSpPr>
             <a:spLocks noGrp="1"/>
           </p:cNvSpPr>
@@ -464,7 +464,7 @@
       </p:sp>
       <p:sp>
         <p:nvSpPr>
-          <p:cNvPr id="201" name="PlaceHolder 3"/>
+          <p:cNvPr id="203" name="PlaceHolder 3"/>
           <p:cNvSpPr>
             <a:spLocks noGrp="1"/>
           </p:cNvSpPr>
@@ -511,7 +511,7 @@
               </a:lnSpc>
               <a:buNone/>
             </a:pPr>
-            <a:fld id="{4D52378E-0B86-477C-83B2-0DDD5E8B4035}" type="slidenum">
+            <a:fld id="{90FC280B-066F-455C-B226-541BF3DA5718}" type="slidenum">
               <a:rPr b="0" lang="en-US" sz="1200" spc="-1" strike="noStrike">
                 <a:solidFill>
                   <a:schemeClr val="dk1"/>
@@ -554,7 +554,7 @@
       </p:grpSpPr>
       <p:sp>
         <p:nvSpPr>
-          <p:cNvPr id="226" name="PlaceHolder 1"/>
+          <p:cNvPr id="228" name="PlaceHolder 1"/>
           <p:cNvSpPr>
             <a:spLocks noGrp="1"/>
           </p:cNvSpPr>
@@ -577,7 +577,7 @@
       </p:sp>
       <p:sp>
         <p:nvSpPr>
-          <p:cNvPr id="227" name="PlaceHolder 2"/>
+          <p:cNvPr id="229" name="PlaceHolder 2"/>
           <p:cNvSpPr>
             <a:spLocks noGrp="1"/>
           </p:cNvSpPr>
@@ -617,7 +617,7 @@
       </p:sp>
       <p:sp>
         <p:nvSpPr>
-          <p:cNvPr id="228" name="PlaceHolder 3"/>
+          <p:cNvPr id="230" name="PlaceHolder 3"/>
           <p:cNvSpPr>
             <a:spLocks noGrp="1"/>
           </p:cNvSpPr>
@@ -664,7 +664,7 @@
               </a:lnSpc>
               <a:buNone/>
             </a:pPr>
-            <a:fld id="{24BF49C1-FFE1-406C-9F0D-FEF09A0E6153}" type="slidenum">
+            <a:fld id="{6A34D6C4-FFA9-461F-93E8-CD7E21AC4BEB}" type="slidenum">
               <a:rPr b="0" lang="en-US" sz="1200" spc="-1" strike="noStrike">
                 <a:solidFill>
                   <a:schemeClr val="dk1"/>
@@ -707,7 +707,7 @@
       </p:grpSpPr>
       <p:sp>
         <p:nvSpPr>
-          <p:cNvPr id="202" name="PlaceHolder 1"/>
+          <p:cNvPr id="204" name="PlaceHolder 1"/>
           <p:cNvSpPr>
             <a:spLocks noGrp="1"/>
           </p:cNvSpPr>
@@ -730,7 +730,7 @@
       </p:sp>
       <p:sp>
         <p:nvSpPr>
-          <p:cNvPr id="203" name="PlaceHolder 2"/>
+          <p:cNvPr id="205" name="PlaceHolder 2"/>
           <p:cNvSpPr>
             <a:spLocks noGrp="1"/>
           </p:cNvSpPr>
@@ -770,7 +770,7 @@
       </p:sp>
       <p:sp>
         <p:nvSpPr>
-          <p:cNvPr id="204" name="PlaceHolder 3"/>
+          <p:cNvPr id="206" name="PlaceHolder 3"/>
           <p:cNvSpPr>
             <a:spLocks noGrp="1"/>
           </p:cNvSpPr>
@@ -817,7 +817,7 @@
               </a:lnSpc>
               <a:buNone/>
             </a:pPr>
-            <a:fld id="{0CA1B567-EDE2-43D5-A984-F3F29AE21206}" type="slidenum">
+            <a:fld id="{9BDFA7F7-17FD-4918-81F0-557635597E75}" type="slidenum">
               <a:rPr b="0" lang="en-US" sz="1200" spc="-1" strike="noStrike">
                 <a:solidFill>
                   <a:schemeClr val="dk1"/>
@@ -860,7 +860,7 @@
       </p:grpSpPr>
       <p:sp>
         <p:nvSpPr>
-          <p:cNvPr id="205" name="PlaceHolder 1"/>
+          <p:cNvPr id="207" name="PlaceHolder 1"/>
           <p:cNvSpPr>
             <a:spLocks noGrp="1"/>
           </p:cNvSpPr>
@@ -883,7 +883,7 @@
       </p:sp>
       <p:sp>
         <p:nvSpPr>
-          <p:cNvPr id="206" name="PlaceHolder 2"/>
+          <p:cNvPr id="208" name="PlaceHolder 2"/>
           <p:cNvSpPr>
             <a:spLocks noGrp="1"/>
           </p:cNvSpPr>
@@ -923,7 +923,7 @@
       </p:sp>
       <p:sp>
         <p:nvSpPr>
-          <p:cNvPr id="207" name="PlaceHolder 3"/>
+          <p:cNvPr id="209" name="PlaceHolder 3"/>
           <p:cNvSpPr>
             <a:spLocks noGrp="1"/>
           </p:cNvSpPr>
@@ -970,7 +970,7 @@
               </a:lnSpc>
               <a:buNone/>
             </a:pPr>
-            <a:fld id="{2758BB80-1EAE-4466-86E3-E8ED527DFE17}" type="slidenum">
+            <a:fld id="{73B10B7B-FBEC-462F-AD9E-1428E3B3A113}" type="slidenum">
               <a:rPr b="0" lang="en-US" sz="1200" spc="-1" strike="noStrike">
                 <a:solidFill>
                   <a:schemeClr val="dk1"/>
@@ -1013,7 +1013,7 @@
       </p:grpSpPr>
       <p:sp>
         <p:nvSpPr>
-          <p:cNvPr id="208" name="PlaceHolder 1"/>
+          <p:cNvPr id="210" name="PlaceHolder 1"/>
           <p:cNvSpPr>
             <a:spLocks noGrp="1"/>
           </p:cNvSpPr>
@@ -1036,7 +1036,7 @@
       </p:sp>
       <p:sp>
         <p:nvSpPr>
-          <p:cNvPr id="209" name="PlaceHolder 2"/>
+          <p:cNvPr id="211" name="PlaceHolder 2"/>
           <p:cNvSpPr>
             <a:spLocks noGrp="1"/>
           </p:cNvSpPr>
@@ -1076,7 +1076,7 @@
       </p:sp>
       <p:sp>
         <p:nvSpPr>
-          <p:cNvPr id="210" name="PlaceHolder 3"/>
+          <p:cNvPr id="212" name="PlaceHolder 3"/>
           <p:cNvSpPr>
             <a:spLocks noGrp="1"/>
           </p:cNvSpPr>
@@ -1123,7 +1123,7 @@
               </a:lnSpc>
               <a:buNone/>
             </a:pPr>
-            <a:fld id="{C56106DC-6734-4B62-932B-2B057B6A1AB0}" type="slidenum">
+            <a:fld id="{C0DC2B0F-B138-4603-8FA6-86B4BB2370BA}" type="slidenum">
               <a:rPr b="0" lang="en-US" sz="1200" spc="-1" strike="noStrike">
                 <a:solidFill>
                   <a:schemeClr val="dk1"/>
@@ -1166,7 +1166,7 @@
       </p:grpSpPr>
       <p:sp>
         <p:nvSpPr>
-          <p:cNvPr id="211" name="PlaceHolder 1"/>
+          <p:cNvPr id="213" name="PlaceHolder 1"/>
           <p:cNvSpPr>
             <a:spLocks noGrp="1"/>
           </p:cNvSpPr>
@@ -1189,7 +1189,7 @@
       </p:sp>
       <p:sp>
         <p:nvSpPr>
-          <p:cNvPr id="212" name="PlaceHolder 2"/>
+          <p:cNvPr id="214" name="PlaceHolder 2"/>
           <p:cNvSpPr>
             <a:spLocks noGrp="1"/>
           </p:cNvSpPr>
@@ -1229,7 +1229,7 @@
       </p:sp>
       <p:sp>
         <p:nvSpPr>
-          <p:cNvPr id="213" name="PlaceHolder 3"/>
+          <p:cNvPr id="215" name="PlaceHolder 3"/>
           <p:cNvSpPr>
             <a:spLocks noGrp="1"/>
           </p:cNvSpPr>
@@ -1276,7 +1276,7 @@
               </a:lnSpc>
               <a:buNone/>
             </a:pPr>
-            <a:fld id="{E124FBBE-6E33-44BA-9245-B2FF1F77C76D}" type="slidenum">
+            <a:fld id="{8E53BE48-E0E7-493B-A968-935C72A027CA}" type="slidenum">
               <a:rPr b="0" lang="en-US" sz="1200" spc="-1" strike="noStrike">
                 <a:solidFill>
                   <a:schemeClr val="dk1"/>
@@ -1319,7 +1319,7 @@
       </p:grpSpPr>
       <p:sp>
         <p:nvSpPr>
-          <p:cNvPr id="214" name="PlaceHolder 1"/>
+          <p:cNvPr id="216" name="PlaceHolder 1"/>
           <p:cNvSpPr>
             <a:spLocks noGrp="1"/>
           </p:cNvSpPr>
@@ -1342,7 +1342,7 @@
       </p:sp>
       <p:sp>
         <p:nvSpPr>
-          <p:cNvPr id="215" name="PlaceHolder 2"/>
+          <p:cNvPr id="217" name="PlaceHolder 2"/>
           <p:cNvSpPr>
             <a:spLocks noGrp="1"/>
           </p:cNvSpPr>
@@ -1382,7 +1382,7 @@
       </p:sp>
       <p:sp>
         <p:nvSpPr>
-          <p:cNvPr id="216" name="PlaceHolder 3"/>
+          <p:cNvPr id="218" name="PlaceHolder 3"/>
           <p:cNvSpPr>
             <a:spLocks noGrp="1"/>
           </p:cNvSpPr>
@@ -1429,7 +1429,7 @@
               </a:lnSpc>
               <a:buNone/>
             </a:pPr>
-            <a:fld id="{C9EAB4C4-23B3-4A1E-BC2B-84511E876EFB}" type="slidenum">
+            <a:fld id="{3673A24B-A9DD-44E6-8883-BD32CFDF78DE}" type="slidenum">
               <a:rPr b="0" lang="en-US" sz="1200" spc="-1" strike="noStrike">
                 <a:solidFill>
                   <a:schemeClr val="dk1"/>
@@ -1472,7 +1472,7 @@
       </p:grpSpPr>
       <p:sp>
         <p:nvSpPr>
-          <p:cNvPr id="217" name="PlaceHolder 1"/>
+          <p:cNvPr id="219" name="PlaceHolder 1"/>
           <p:cNvSpPr>
             <a:spLocks noGrp="1"/>
           </p:cNvSpPr>
@@ -1495,7 +1495,7 @@
       </p:sp>
       <p:sp>
         <p:nvSpPr>
-          <p:cNvPr id="218" name="PlaceHolder 2"/>
+          <p:cNvPr id="220" name="PlaceHolder 2"/>
           <p:cNvSpPr>
             <a:spLocks noGrp="1"/>
           </p:cNvSpPr>
@@ -1535,7 +1535,7 @@
       </p:sp>
       <p:sp>
         <p:nvSpPr>
-          <p:cNvPr id="219" name="PlaceHolder 3"/>
+          <p:cNvPr id="221" name="PlaceHolder 3"/>
           <p:cNvSpPr>
             <a:spLocks noGrp="1"/>
           </p:cNvSpPr>
@@ -1582,7 +1582,7 @@
               </a:lnSpc>
               <a:buNone/>
             </a:pPr>
-            <a:fld id="{37854FF3-ED23-41AA-9661-CFDEB60080B4}" type="slidenum">
+            <a:fld id="{C9D50D52-2717-4E65-A2C8-16C3258FD733}" type="slidenum">
               <a:rPr b="0" lang="en-US" sz="1200" spc="-1" strike="noStrike">
                 <a:solidFill>
                   <a:schemeClr val="dk1"/>
@@ -1625,7 +1625,7 @@
       </p:grpSpPr>
       <p:sp>
         <p:nvSpPr>
-          <p:cNvPr id="220" name="PlaceHolder 1"/>
+          <p:cNvPr id="222" name="PlaceHolder 1"/>
           <p:cNvSpPr>
             <a:spLocks noGrp="1"/>
           </p:cNvSpPr>
@@ -1648,7 +1648,7 @@
       </p:sp>
       <p:sp>
         <p:nvSpPr>
-          <p:cNvPr id="221" name="PlaceHolder 2"/>
+          <p:cNvPr id="223" name="PlaceHolder 2"/>
           <p:cNvSpPr>
             <a:spLocks noGrp="1"/>
           </p:cNvSpPr>
@@ -1688,7 +1688,7 @@
       </p:sp>
       <p:sp>
         <p:nvSpPr>
-          <p:cNvPr id="222" name="PlaceHolder 3"/>
+          <p:cNvPr id="224" name="PlaceHolder 3"/>
           <p:cNvSpPr>
             <a:spLocks noGrp="1"/>
           </p:cNvSpPr>
@@ -1735,7 +1735,7 @@
               </a:lnSpc>
               <a:buNone/>
             </a:pPr>
-            <a:fld id="{D19A0E51-975E-4285-ACE9-82148D27233C}" type="slidenum">
+            <a:fld id="{9DAA5C74-AC9F-4C7B-8EC7-CC82F9E2AA50}" type="slidenum">
               <a:rPr b="0" lang="en-US" sz="1200" spc="-1" strike="noStrike">
                 <a:solidFill>
                   <a:schemeClr val="dk1"/>
@@ -1778,7 +1778,7 @@
       </p:grpSpPr>
       <p:sp>
         <p:nvSpPr>
-          <p:cNvPr id="223" name="PlaceHolder 1"/>
+          <p:cNvPr id="225" name="PlaceHolder 1"/>
           <p:cNvSpPr>
             <a:spLocks noGrp="1"/>
           </p:cNvSpPr>
@@ -1801,7 +1801,7 @@
       </p:sp>
       <p:sp>
         <p:nvSpPr>
-          <p:cNvPr id="224" name="PlaceHolder 2"/>
+          <p:cNvPr id="226" name="PlaceHolder 2"/>
           <p:cNvSpPr>
             <a:spLocks noGrp="1"/>
           </p:cNvSpPr>
@@ -1841,7 +1841,7 @@
       </p:sp>
       <p:sp>
         <p:nvSpPr>
-          <p:cNvPr id="225" name="PlaceHolder 3"/>
+          <p:cNvPr id="227" name="PlaceHolder 3"/>
           <p:cNvSpPr>
             <a:spLocks noGrp="1"/>
           </p:cNvSpPr>
@@ -1888,7 +1888,7 @@
               </a:lnSpc>
               <a:buNone/>
             </a:pPr>
-            <a:fld id="{93F6FCD3-A1CA-471A-AC6A-099F76FC385C}" type="slidenum">
+            <a:fld id="{682B0F5A-AF28-4F63-B283-ABCE7830156B}" type="slidenum">
               <a:rPr b="0" lang="en-US" sz="1200" spc="-1" strike="noStrike">
                 <a:solidFill>
                   <a:schemeClr val="dk1"/>
@@ -2043,7 +2043,7 @@
         <p:txBody>
           <a:bodyPr/>
           <a:p>
-            <a:fld id="{D2C594D0-93A2-4321-A3B3-4FD2CF1BDDF8}" type="slidenum">
+            <a:fld id="{DE435118-A97F-4348-A49E-8C863EEC2ECB}" type="slidenum">
               <a:t>&lt;#&gt;</a:t>
             </a:fld>
           </a:p>
@@ -2126,7 +2126,7 @@
         <p:txBody>
           <a:bodyPr/>
           <a:p>
-            <a:fld id="{AD331AFC-299E-4FDF-BEE8-17949A65D2C0}" type="slidenum">
+            <a:fld id="{E7DFEB3D-7313-48AF-95F5-39B83C0FA1C3}" type="slidenum">
               <a:t>&lt;#&gt;</a:t>
             </a:fld>
           </a:p>
@@ -2209,7 +2209,7 @@
         <p:txBody>
           <a:bodyPr/>
           <a:p>
-            <a:fld id="{FD43EE41-DA29-4839-A37A-6107E3FA3F31}" type="slidenum">
+            <a:fld id="{C0062EDD-F3AA-469C-9AE4-845331BCDFAE}" type="slidenum">
               <a:t>&lt;#&gt;</a:t>
             </a:fld>
           </a:p>
@@ -2292,7 +2292,7 @@
         <p:txBody>
           <a:bodyPr/>
           <a:p>
-            <a:fld id="{6C4AE95D-5FED-4141-B0D4-A9F9F3CE982D}" type="slidenum">
+            <a:fld id="{3A709008-C560-47F0-85C6-145809B02911}" type="slidenum">
               <a:t>&lt;#&gt;</a:t>
             </a:fld>
           </a:p>
@@ -2375,7 +2375,7 @@
         <p:txBody>
           <a:bodyPr/>
           <a:p>
-            <a:fld id="{E6BA491E-2584-4EAE-ACEB-07887296306E}" type="slidenum">
+            <a:fld id="{EF3163B4-019E-41D8-8517-E6E66F1312DD}" type="slidenum">
               <a:t>&lt;#&gt;</a:t>
             </a:fld>
           </a:p>
@@ -2458,7 +2458,7 @@
         <p:txBody>
           <a:bodyPr/>
           <a:p>
-            <a:fld id="{DB5600AE-0C41-4902-82A9-E84FE04540EE}" type="slidenum">
+            <a:fld id="{DBF8B703-460A-4C96-8E3E-33DD8DF28689}" type="slidenum">
               <a:t>&lt;#&gt;</a:t>
             </a:fld>
           </a:p>
@@ -2521,7 +2521,7 @@
         <p:txBody>
           <a:bodyPr/>
           <a:p>
-            <a:fld id="{71514F61-24AE-4F1C-A0A2-CD4E37E08CA8}" type="slidenum">
+            <a:fld id="{2BB55053-2F5D-4316-B034-1ECBC5873DF5}" type="slidenum">
               <a:t>&lt;#&gt;</a:t>
             </a:fld>
           </a:p>
@@ -2669,7 +2669,7 @@
         <p:txBody>
           <a:bodyPr/>
           <a:p>
-            <a:fld id="{02AA363B-AD53-4D7A-8667-655A1EF8D67B}" type="slidenum">
+            <a:fld id="{A666D099-85F1-4CA8-92CA-CB7CA9752F58}" type="slidenum">
               <a:t>&lt;#&gt;</a:t>
             </a:fld>
           </a:p>
@@ -2752,7 +2752,7 @@
         <p:txBody>
           <a:bodyPr/>
           <a:p>
-            <a:fld id="{E599968C-3CB6-4FEA-86E3-A8DE5FA93EC6}" type="slidenum">
+            <a:fld id="{8BC32182-1BBE-4EC2-AEEF-85DD7C53D1A8}" type="slidenum">
               <a:t>&lt;#&gt;</a:t>
             </a:fld>
           </a:p>
@@ -2967,7 +2967,7 @@
         <p:txBody>
           <a:bodyPr/>
           <a:p>
-            <a:fld id="{F784AE22-4FDD-4953-83D6-21FDEA1E83D4}" type="slidenum">
+            <a:fld id="{218E5CBE-7A1C-4710-856E-8500B644B847}" type="slidenum">
               <a:t>&lt;#&gt;</a:t>
             </a:fld>
           </a:p>
@@ -3050,7 +3050,7 @@
         <p:txBody>
           <a:bodyPr/>
           <a:p>
-            <a:fld id="{0E3D9C72-6858-4834-8F02-FFDFDE7372C5}" type="slidenum">
+            <a:fld id="{C018B652-4688-4C9D-8301-34B7918C123E}" type="slidenum">
               <a:t>&lt;#&gt;</a:t>
             </a:fld>
           </a:p>
@@ -3173,7 +3173,7 @@
         <p:txBody>
           <a:bodyPr/>
           <a:p>
-            <a:fld id="{27F4C68D-B492-4469-B539-E123BC3BF93C}" type="slidenum">
+            <a:fld id="{07784109-0A7E-42C9-81AE-EAF71396A334}" type="slidenum">
               <a:t>&lt;#&gt;</a:t>
             </a:fld>
           </a:p>
@@ -3270,7 +3270,7 @@
                 </a:solidFill>
                 <a:latin typeface="Aptos Display"/>
               </a:rPr>
-              <a:t>Kliknut</a:t>
+              <a:t>Kliknutím lze </a:t>
             </a:r>
             <a:r>
               <a:rPr b="0" lang="cs-CZ" sz="6000" spc="-1" strike="noStrike">
@@ -3279,25 +3279,7 @@
                 </a:solidFill>
                 <a:latin typeface="Aptos Display"/>
               </a:rPr>
-              <a:t>ím lze </a:t>
-            </a:r>
-            <a:r>
-              <a:rPr b="0" lang="cs-CZ" sz="6000" spc="-1" strike="noStrike">
-                <a:solidFill>
-                  <a:schemeClr val="dk1"/>
-                </a:solidFill>
-                <a:latin typeface="Aptos Display"/>
-              </a:rPr>
-              <a:t>upravit </a:t>
-            </a:r>
-            <a:r>
-              <a:rPr b="0" lang="cs-CZ" sz="6000" spc="-1" strike="noStrike">
-                <a:solidFill>
-                  <a:schemeClr val="dk1"/>
-                </a:solidFill>
-                <a:latin typeface="Aptos Display"/>
-              </a:rPr>
-              <a:t>styl.</a:t>
+              <a:t>upravit styl.</a:t>
             </a:r>
             <a:endParaRPr b="0" lang="cs-CZ" sz="6000" spc="-1" strike="noStrike">
               <a:solidFill>
@@ -3367,7 +3349,7 @@
                 </a:solidFill>
                 <a:latin typeface="Aptos"/>
               </a:rPr>
-              <a:t> </a:t>
+              <a:t>&lt;datum/čas&gt;</a:t>
             </a:r>
             <a:endParaRPr b="0" lang="cs-CZ" sz="1200" spc="-1" strike="noStrike">
               <a:solidFill>
@@ -3427,7 +3409,7 @@
                 </a:solidFill>
                 <a:latin typeface="Times New Roman"/>
               </a:rPr>
-              <a:t> </a:t>
+              <a:t>&lt;zápatí&gt;</a:t>
             </a:r>
             <a:endParaRPr b="0" lang="cs-CZ" sz="1400" spc="-1" strike="noStrike">
               <a:solidFill>
@@ -3488,7 +3470,7 @@
               </a:lnSpc>
               <a:buNone/>
             </a:pPr>
-            <a:fld id="{84F811A3-D832-47DC-9C86-0A9E69E7A3C7}" type="slidenum">
+            <a:fld id="{F68B9934-5B24-4D0A-B55F-B9D979807B53}" type="slidenum">
               <a:rPr b="0" lang="cs-CZ" sz="1200" spc="-1" strike="noStrike">
                 <a:solidFill>
                   <a:schemeClr val="dk1">
@@ -3497,7 +3479,7 @@
                 </a:solidFill>
                 <a:latin typeface="Aptos"/>
               </a:rPr>
-              <a:t>4</a:t>
+              <a:t>&lt;číslo&gt;</a:t>
             </a:fld>
             <a:endParaRPr b="0" lang="cs-CZ" sz="1200" spc="-1" strike="noStrike">
               <a:solidFill>
@@ -3721,7 +3703,7 @@
               </a:lnSpc>
               <a:buNone/>
             </a:pPr>
-            <a:fld id="{19AD3607-4045-4E1F-9B64-1E2514822AC7}" type="slidenum">
+            <a:fld id="{1F55FD13-75A0-40B5-8213-ACDC7AA63A46}" type="slidenum">
               <a:rPr b="0" lang="cs-CZ" sz="1200" spc="-1" strike="noStrike">
                 <a:solidFill>
                   <a:schemeClr val="dk1">
@@ -4243,7 +4225,7 @@
               </a:lnSpc>
               <a:buNone/>
             </a:pPr>
-            <a:fld id="{DA36D315-BE34-4319-85E7-918721013793}" type="slidenum">
+            <a:fld id="{79759208-6258-48AB-9D1A-028CF917A0D3}" type="slidenum">
               <a:rPr b="0" lang="cs-CZ" sz="1200" spc="-1" strike="noStrike">
                 <a:solidFill>
                   <a:schemeClr val="dk1">
@@ -4832,7 +4814,7 @@
               </a:lnSpc>
               <a:buNone/>
             </a:pPr>
-            <a:fld id="{C8E78AA1-3469-4ED0-B948-2E0036A39405}" type="slidenum">
+            <a:fld id="{93F74865-63D5-4931-BB53-40F1297113D2}" type="slidenum">
               <a:rPr b="0" lang="cs-CZ" sz="1200" spc="-1" strike="noStrike">
                 <a:solidFill>
                   <a:schemeClr val="dk1">
@@ -4926,7 +4908,178 @@
                 </a:solidFill>
                 <a:latin typeface="Aptos Display"/>
               </a:rPr>
-              <a:t>Kliknutím lze upravit styl.</a:t>
+              <a:t>K</a:t>
+            </a:r>
+            <a:r>
+              <a:rPr b="0" lang="cs-CZ" sz="4400" spc="-1" strike="noStrike">
+                <a:solidFill>
+                  <a:schemeClr val="dk1"/>
+                </a:solidFill>
+                <a:latin typeface="Aptos Display"/>
+              </a:rPr>
+              <a:t>li</a:t>
+            </a:r>
+            <a:r>
+              <a:rPr b="0" lang="cs-CZ" sz="4400" spc="-1" strike="noStrike">
+                <a:solidFill>
+                  <a:schemeClr val="dk1"/>
+                </a:solidFill>
+                <a:latin typeface="Aptos Display"/>
+              </a:rPr>
+              <a:t>k</a:t>
+            </a:r>
+            <a:r>
+              <a:rPr b="0" lang="cs-CZ" sz="4400" spc="-1" strike="noStrike">
+                <a:solidFill>
+                  <a:schemeClr val="dk1"/>
+                </a:solidFill>
+                <a:latin typeface="Aptos Display"/>
+              </a:rPr>
+              <a:t>n</a:t>
+            </a:r>
+            <a:r>
+              <a:rPr b="0" lang="cs-CZ" sz="4400" spc="-1" strike="noStrike">
+                <a:solidFill>
+                  <a:schemeClr val="dk1"/>
+                </a:solidFill>
+                <a:latin typeface="Aptos Display"/>
+              </a:rPr>
+              <a:t>u</a:t>
+            </a:r>
+            <a:r>
+              <a:rPr b="0" lang="cs-CZ" sz="4400" spc="-1" strike="noStrike">
+                <a:solidFill>
+                  <a:schemeClr val="dk1"/>
+                </a:solidFill>
+                <a:latin typeface="Aptos Display"/>
+              </a:rPr>
+              <a:t>tí</a:t>
+            </a:r>
+            <a:r>
+              <a:rPr b="0" lang="cs-CZ" sz="4400" spc="-1" strike="noStrike">
+                <a:solidFill>
+                  <a:schemeClr val="dk1"/>
+                </a:solidFill>
+                <a:latin typeface="Aptos Display"/>
+              </a:rPr>
+              <a:t>m</a:t>
+            </a:r>
+            <a:r>
+              <a:rPr b="0" lang="cs-CZ" sz="4400" spc="-1" strike="noStrike">
+                <a:solidFill>
+                  <a:schemeClr val="dk1"/>
+                </a:solidFill>
+                <a:latin typeface="Aptos Display"/>
+              </a:rPr>
+              <a:t> </a:t>
+            </a:r>
+            <a:r>
+              <a:rPr b="0" lang="cs-CZ" sz="4400" spc="-1" strike="noStrike">
+                <a:solidFill>
+                  <a:schemeClr val="dk1"/>
+                </a:solidFill>
+                <a:latin typeface="Aptos Display"/>
+              </a:rPr>
+              <a:t>lz</a:t>
+            </a:r>
+            <a:r>
+              <a:rPr b="0" lang="cs-CZ" sz="4400" spc="-1" strike="noStrike">
+                <a:solidFill>
+                  <a:schemeClr val="dk1"/>
+                </a:solidFill>
+                <a:latin typeface="Aptos Display"/>
+              </a:rPr>
+              <a:t>e </a:t>
+            </a:r>
+            <a:r>
+              <a:rPr b="0" lang="cs-CZ" sz="4400" spc="-1" strike="noStrike">
+                <a:solidFill>
+                  <a:schemeClr val="dk1"/>
+                </a:solidFill>
+                <a:latin typeface="Aptos Display"/>
+              </a:rPr>
+              <a:t>u</a:t>
+            </a:r>
+            <a:r>
+              <a:rPr b="0" lang="cs-CZ" sz="4400" spc="-1" strike="noStrike">
+                <a:solidFill>
+                  <a:schemeClr val="dk1"/>
+                </a:solidFill>
+                <a:latin typeface="Aptos Display"/>
+              </a:rPr>
+              <a:t>p</a:t>
+            </a:r>
+            <a:r>
+              <a:rPr b="0" lang="cs-CZ" sz="4400" spc="-1" strike="noStrike">
+                <a:solidFill>
+                  <a:schemeClr val="dk1"/>
+                </a:solidFill>
+                <a:latin typeface="Aptos Display"/>
+              </a:rPr>
+              <a:t>r</a:t>
+            </a:r>
+            <a:r>
+              <a:rPr b="0" lang="cs-CZ" sz="4400" spc="-1" strike="noStrike">
+                <a:solidFill>
+                  <a:schemeClr val="dk1"/>
+                </a:solidFill>
+                <a:latin typeface="Aptos Display"/>
+              </a:rPr>
+              <a:t>a</a:t>
+            </a:r>
+            <a:r>
+              <a:rPr b="0" lang="cs-CZ" sz="4400" spc="-1" strike="noStrike">
+                <a:solidFill>
+                  <a:schemeClr val="dk1"/>
+                </a:solidFill>
+                <a:latin typeface="Aptos Display"/>
+              </a:rPr>
+              <a:t>vi</a:t>
+            </a:r>
+            <a:r>
+              <a:rPr b="0" lang="cs-CZ" sz="4400" spc="-1" strike="noStrike">
+                <a:solidFill>
+                  <a:schemeClr val="dk1"/>
+                </a:solidFill>
+                <a:latin typeface="Aptos Display"/>
+              </a:rPr>
+              <a:t>t </a:t>
+            </a:r>
+            <a:r>
+              <a:rPr b="0" lang="cs-CZ" sz="4400" spc="-1" strike="noStrike">
+                <a:solidFill>
+                  <a:schemeClr val="dk1"/>
+                </a:solidFill>
+                <a:latin typeface="Aptos Display"/>
+              </a:rPr>
+              <a:t>s</a:t>
+            </a:r>
+            <a:r>
+              <a:rPr b="0" lang="cs-CZ" sz="4400" spc="-1" strike="noStrike">
+                <a:solidFill>
+                  <a:schemeClr val="dk1"/>
+                </a:solidFill>
+                <a:latin typeface="Aptos Display"/>
+              </a:rPr>
+              <a:t>t</a:t>
+            </a:r>
+            <a:r>
+              <a:rPr b="0" lang="cs-CZ" sz="4400" spc="-1" strike="noStrike">
+                <a:solidFill>
+                  <a:schemeClr val="dk1"/>
+                </a:solidFill>
+                <a:latin typeface="Aptos Display"/>
+              </a:rPr>
+              <a:t>yl</a:t>
+            </a:r>
+            <a:r>
+              <a:rPr b="0" lang="cs-CZ" sz="4400" spc="-1" strike="noStrike">
+                <a:solidFill>
+                  <a:schemeClr val="dk1"/>
+                </a:solidFill>
+                <a:latin typeface="Aptos Display"/>
+              </a:rPr>
+              <a:t>.</a:t>
             </a:r>
             <a:endParaRPr b="0" lang="cs-CZ" sz="4400" spc="-1" strike="noStrike">
               <a:solidFill>
@@ -5296,7 +5449,7 @@
               </a:lnSpc>
               <a:buNone/>
             </a:pPr>
-            <a:fld id="{EAD032CF-4F1E-42C9-A744-6E506018DD53}" type="slidenum">
+            <a:fld id="{8B3F3850-7AD3-4CB5-B097-0167BA527298}" type="slidenum">
               <a:rPr b="0" lang="cs-CZ" sz="1200" spc="-1" strike="noStrike">
                 <a:solidFill>
                   <a:schemeClr val="dk1">
@@ -5390,7 +5543,241 @@
                 </a:solidFill>
                 <a:latin typeface="Aptos Display"/>
               </a:rPr>
-              <a:t>Kliknutím lze upravit styl.</a:t>
+              <a:t>K</a:t>
+            </a:r>
+            <a:r>
+              <a:rPr b="0" lang="cs-CZ" sz="4400" spc="-1" strike="noStrike">
+                <a:solidFill>
+                  <a:schemeClr val="dk1"/>
+                </a:solidFill>
+                <a:latin typeface="Aptos Display"/>
+              </a:rPr>
+              <a:t>l</a:t>
+            </a:r>
+            <a:r>
+              <a:rPr b="0" lang="cs-CZ" sz="4400" spc="-1" strike="noStrike">
+                <a:solidFill>
+                  <a:schemeClr val="dk1"/>
+                </a:solidFill>
+                <a:latin typeface="Aptos Display"/>
+              </a:rPr>
+              <a:t>i</a:t>
+            </a:r>
+            <a:r>
+              <a:rPr b="0" lang="cs-CZ" sz="4400" spc="-1" strike="noStrike">
+                <a:solidFill>
+                  <a:schemeClr val="dk1"/>
+                </a:solidFill>
+                <a:latin typeface="Aptos Display"/>
+              </a:rPr>
+              <a:t>k</a:t>
+            </a:r>
+            <a:r>
+              <a:rPr b="0" lang="cs-CZ" sz="4400" spc="-1" strike="noStrike">
+                <a:solidFill>
+                  <a:schemeClr val="dk1"/>
+                </a:solidFill>
+                <a:latin typeface="Aptos Display"/>
+              </a:rPr>
+              <a:t>n</a:t>
+            </a:r>
+            <a:r>
+              <a:rPr b="0" lang="cs-CZ" sz="4400" spc="-1" strike="noStrike">
+                <a:solidFill>
+                  <a:schemeClr val="dk1"/>
+                </a:solidFill>
+                <a:latin typeface="Aptos Display"/>
+              </a:rPr>
+              <a:t>u</a:t>
+            </a:r>
+            <a:r>
+              <a:rPr b="0" lang="cs-CZ" sz="4400" spc="-1" strike="noStrike">
+                <a:solidFill>
+                  <a:schemeClr val="dk1"/>
+                </a:solidFill>
+                <a:latin typeface="Aptos Display"/>
+              </a:rPr>
+              <a:t>t</a:t>
+            </a:r>
+            <a:r>
+              <a:rPr b="0" lang="cs-CZ" sz="4400" spc="-1" strike="noStrike">
+                <a:solidFill>
+                  <a:schemeClr val="dk1"/>
+                </a:solidFill>
+                <a:latin typeface="Aptos Display"/>
+              </a:rPr>
+              <a:t>í</a:t>
+            </a:r>
+            <a:r>
+              <a:rPr b="0" lang="cs-CZ" sz="4400" spc="-1" strike="noStrike">
+                <a:solidFill>
+                  <a:schemeClr val="dk1"/>
+                </a:solidFill>
+                <a:latin typeface="Aptos Display"/>
+              </a:rPr>
+              <a:t>m</a:t>
+            </a:r>
+            <a:r>
+              <a:rPr b="0" lang="cs-CZ" sz="4400" spc="-1" strike="noStrike">
+                <a:solidFill>
+                  <a:schemeClr val="dk1"/>
+                </a:solidFill>
+                <a:latin typeface="Aptos Display"/>
+              </a:rPr>
+              <a:t> </a:t>
+            </a:r>
+            <a:r>
+              <a:rPr b="0" lang="cs-CZ" sz="4400" spc="-1" strike="noStrike">
+                <a:solidFill>
+                  <a:schemeClr val="dk1"/>
+                </a:solidFill>
+                <a:latin typeface="Aptos Display"/>
+              </a:rPr>
+              <a:t>l</a:t>
+            </a:r>
+            <a:r>
+              <a:rPr b="0" lang="cs-CZ" sz="4400" spc="-1" strike="noStrike">
+                <a:solidFill>
+                  <a:schemeClr val="dk1"/>
+                </a:solidFill>
+                <a:latin typeface="Aptos Display"/>
+              </a:rPr>
+              <a:t>z</a:t>
+            </a:r>
+            <a:r>
+              <a:rPr b="0" lang="cs-CZ" sz="4400" spc="-1" strike="noStrike">
+                <a:solidFill>
+                  <a:schemeClr val="dk1"/>
+                </a:solidFill>
+                <a:latin typeface="Aptos Display"/>
+              </a:rPr>
+              <a:t>e</a:t>
+            </a:r>
+            <a:r>
+              <a:rPr b="0" lang="cs-CZ" sz="4400" spc="-1" strike="noStrike">
+                <a:solidFill>
+                  <a:schemeClr val="dk1"/>
+                </a:solidFill>
+                <a:latin typeface="Aptos Display"/>
+              </a:rPr>
+              <a:t> </a:t>
+            </a:r>
+            <a:r>
+              <a:rPr b="0" lang="cs-CZ" sz="4400" spc="-1" strike="noStrike">
+                <a:solidFill>
+                  <a:schemeClr val="dk1"/>
+                </a:solidFill>
+                <a:latin typeface="Aptos Display"/>
+              </a:rPr>
+              <a:t>u</a:t>
+            </a:r>
+            <a:r>
+              <a:rPr b="0" lang="cs-CZ" sz="4400" spc="-1" strike="noStrike">
+                <a:solidFill>
+                  <a:schemeClr val="dk1"/>
+                </a:solidFill>
+                <a:latin typeface="Aptos Display"/>
+              </a:rPr>
+              <a:t>p</a:t>
+            </a:r>
+            <a:r>
+              <a:rPr b="0" lang="cs-CZ" sz="4400" spc="-1" strike="noStrike">
+                <a:solidFill>
+                  <a:schemeClr val="dk1"/>
+                </a:solidFill>
+                <a:latin typeface="Aptos Display"/>
+              </a:rPr>
+              <a:t>r</a:t>
+            </a:r>
+            <a:r>
+              <a:rPr b="0" lang="cs-CZ" sz="4400" spc="-1" strike="noStrike">
+                <a:solidFill>
+                  <a:schemeClr val="dk1"/>
+                </a:solidFill>
+                <a:latin typeface="Aptos Display"/>
+              </a:rPr>
+              <a:t>a</a:t>
+            </a:r>
+            <a:r>
+              <a:rPr b="0" lang="cs-CZ" sz="4400" spc="-1" strike="noStrike">
+                <a:solidFill>
+                  <a:schemeClr val="dk1"/>
+                </a:solidFill>
+                <a:latin typeface="Aptos Display"/>
+              </a:rPr>
+              <a:t>v</a:t>
+            </a:r>
+            <a:r>
+              <a:rPr b="0" lang="cs-CZ" sz="4400" spc="-1" strike="noStrike">
+                <a:solidFill>
+                  <a:schemeClr val="dk1"/>
+                </a:solidFill>
+                <a:latin typeface="Aptos Display"/>
+              </a:rPr>
+              <a:t>i</a:t>
+            </a:r>
+            <a:r>
+              <a:rPr b="0" lang="cs-CZ" sz="4400" spc="-1" strike="noStrike">
+                <a:solidFill>
+                  <a:schemeClr val="dk1"/>
+                </a:solidFill>
+                <a:latin typeface="Aptos Display"/>
+              </a:rPr>
+              <a:t>t</a:t>
+            </a:r>
+            <a:r>
+              <a:rPr b="0" lang="cs-CZ" sz="4400" spc="-1" strike="noStrike">
+                <a:solidFill>
+                  <a:schemeClr val="dk1"/>
+                </a:solidFill>
+                <a:latin typeface="Aptos Display"/>
+              </a:rPr>
+              <a:t> </a:t>
+            </a:r>
+            <a:r>
+              <a:rPr b="0" lang="cs-CZ" sz="4400" spc="-1" strike="noStrike">
+                <a:solidFill>
+                  <a:schemeClr val="dk1"/>
+                </a:solidFill>
+                <a:latin typeface="Aptos Display"/>
+              </a:rPr>
+              <a:t>s</a:t>
+            </a:r>
+            <a:r>
+              <a:rPr b="0" lang="cs-CZ" sz="4400" spc="-1" strike="noStrike">
+                <a:solidFill>
+                  <a:schemeClr val="dk1"/>
+                </a:solidFill>
+                <a:latin typeface="Aptos Display"/>
+              </a:rPr>
+              <a:t>t</a:t>
+            </a:r>
+            <a:r>
+              <a:rPr b="0" lang="cs-CZ" sz="4400" spc="-1" strike="noStrike">
+                <a:solidFill>
+                  <a:schemeClr val="dk1"/>
+                </a:solidFill>
+                <a:latin typeface="Aptos Display"/>
+              </a:rPr>
+              <a:t>y</a:t>
+            </a:r>
+            <a:r>
+              <a:rPr b="0" lang="cs-CZ" sz="4400" spc="-1" strike="noStrike">
+                <a:solidFill>
+                  <a:schemeClr val="dk1"/>
+                </a:solidFill>
+                <a:latin typeface="Aptos Display"/>
+              </a:rPr>
+              <a:t>l</a:t>
+            </a:r>
+            <a:r>
+              <a:rPr b="0" lang="cs-CZ" sz="4400" spc="-1" strike="noStrike">
+                <a:solidFill>
+                  <a:schemeClr val="dk1"/>
+                </a:solidFill>
+                <a:latin typeface="Aptos Display"/>
+              </a:rPr>
+              <a:t>.</a:t>
             </a:r>
             <a:endParaRPr b="0" lang="cs-CZ" sz="4400" spc="-1" strike="noStrike">
               <a:solidFill>
@@ -5760,7 +6147,7 @@
               </a:lnSpc>
               <a:buNone/>
             </a:pPr>
-            <a:fld id="{21AB1600-4C19-40FE-A582-579FF7566B9E}" type="slidenum">
+            <a:fld id="{77696257-0AF6-4616-A699-4EED75623D24}" type="slidenum">
               <a:rPr b="0" lang="cs-CZ" sz="1200" spc="-1" strike="noStrike">
                 <a:solidFill>
                   <a:schemeClr val="dk1">
@@ -6001,7 +6388,7 @@
               </a:lnSpc>
               <a:buNone/>
             </a:pPr>
-            <a:fld id="{65045AC6-3DC3-4E56-85B6-53FA5240928B}" type="slidenum">
+            <a:fld id="{F21ADF2D-6AFF-4D0E-8B8D-43D285461C88}" type="slidenum">
               <a:rPr b="0" lang="en-US" sz="900" spc="-1" strike="noStrike">
                 <a:solidFill>
                   <a:schemeClr val="dk1"/>
@@ -6759,7 +7146,7 @@
               </a:lnSpc>
               <a:buNone/>
             </a:pPr>
-            <a:fld id="{E8BDE673-291B-43F0-BB82-312B8CB2C10F}" type="slidenum">
+            <a:fld id="{E76CF9FF-D9EC-4742-A026-CA400A3BDB3D}" type="slidenum">
               <a:rPr b="0" lang="cs-CZ" sz="1200" spc="-1" strike="noStrike">
                 <a:solidFill>
                   <a:schemeClr val="dk1">
@@ -7104,7 +7491,7 @@
               </a:lnSpc>
               <a:buNone/>
             </a:pPr>
-            <a:fld id="{0EC3E1C0-08FD-4662-9B75-A4B13570B4B0}" type="slidenum">
+            <a:fld id="{AD30F3E0-5CA5-4D1C-AFC7-309B98D35F1C}" type="slidenum">
               <a:rPr b="0" lang="cs-CZ" sz="1200" spc="-1" strike="noStrike">
                 <a:solidFill>
                   <a:schemeClr val="dk1">
@@ -7747,7 +8134,7 @@
               </a:lnSpc>
               <a:buNone/>
             </a:pPr>
-            <a:fld id="{5E913238-061C-4028-AF69-C57D30A8E855}" type="slidenum">
+            <a:fld id="{E3B6AD8A-05D8-4A83-BF28-91F2B13FAF63}" type="slidenum">
               <a:rPr b="0" lang="cs-CZ" sz="1200" spc="-1" strike="noStrike">
                 <a:solidFill>
                   <a:schemeClr val="dk1">
@@ -8506,7 +8893,7 @@
               </a:lnSpc>
               <a:buNone/>
             </a:pPr>
-            <a:fld id="{4593BCFA-FAE2-455E-9799-5429DB209C52}" type="slidenum">
+            <a:fld id="{E0C20793-DD24-4923-A09D-211C81859DB5}" type="slidenum">
               <a:rPr b="0" lang="cs-CZ" sz="1200" spc="-1" strike="noStrike">
                 <a:solidFill>
                   <a:schemeClr val="dk1">
@@ -8791,7 +9178,7 @@
               </a:lnSpc>
               <a:buNone/>
             </a:pPr>
-            <a:fld id="{B9FC622E-A79F-4B49-933B-C0B42CFEF329}" type="slidenum">
+            <a:fld id="{81BACC2C-35F5-43CF-98CA-A745B4D2F97D}" type="slidenum">
               <a:rPr b="0" lang="cs-CZ" sz="1200" spc="-1" strike="noStrike">
                 <a:solidFill>
                   <a:schemeClr val="dk1">
@@ -9191,7 +9578,7 @@
               </a:lnSpc>
               <a:buNone/>
             </a:pPr>
-            <a:fld id="{4A895DC9-AAE8-43A3-9F63-B797B01ACF5A}" type="slidenum">
+            <a:fld id="{77158671-AF3C-4781-8A02-E0FB96790E89}" type="slidenum">
               <a:rPr b="0" lang="en-US" sz="900" spc="-1" strike="noStrike">
                 <a:solidFill>
                   <a:schemeClr val="dk1"/>
@@ -9242,7 +9629,7 @@
       </p:grpSpPr>
       <p:sp>
         <p:nvSpPr>
-          <p:cNvPr id="196" name="Text 0"/>
+          <p:cNvPr id="198" name="Text 0"/>
           <p:cNvSpPr/>
           <p:nvPr/>
         </p:nvSpPr>
@@ -9319,7 +9706,7 @@
       </p:sp>
       <p:sp>
         <p:nvSpPr>
-          <p:cNvPr id="197" name="Text 3"/>
+          <p:cNvPr id="199" name="Text 3"/>
           <p:cNvSpPr/>
           <p:nvPr/>
         </p:nvSpPr>
@@ -9386,7 +9773,7 @@
       </p:sp>
       <p:sp>
         <p:nvSpPr>
-          <p:cNvPr id="198" name="PlaceHolder 1"/>
+          <p:cNvPr id="200" name="PlaceHolder 1"/>
           <p:cNvSpPr>
             <a:spLocks noGrp="1"/>
           </p:cNvSpPr>
@@ -9433,7 +9820,7 @@
               </a:lnSpc>
               <a:buNone/>
             </a:pPr>
-            <a:fld id="{F04549C8-F58E-4A9F-9067-22D36A053776}" type="slidenum">
+            <a:fld id="{89EC5C16-7601-4606-B03F-555D6096BE66}" type="slidenum">
               <a:rPr b="0" lang="en-US" sz="900" spc="-1" strike="noStrike">
                 <a:solidFill>
                   <a:schemeClr val="dk1"/>
@@ -10168,7 +10555,7 @@
               </a:lnSpc>
               <a:buNone/>
             </a:pPr>
-            <a:fld id="{DC61EFF0-8FD2-48BA-ACFD-BC4D7AE4B54D}" type="slidenum">
+            <a:fld id="{25F9F800-E4C7-4807-B878-2CD62AF37B9E}" type="slidenum">
               <a:rPr b="0" lang="en-US" sz="900" spc="-1" strike="noStrike">
                 <a:solidFill>
                   <a:schemeClr val="dk1"/>
@@ -12894,7 +13281,7 @@
               </a:lnSpc>
               <a:buNone/>
             </a:pPr>
-            <a:fld id="{5181511B-0437-4B2D-BCBE-F5C0413F3F61}" type="slidenum">
+            <a:fld id="{18DDD546-39FA-4D2A-906B-C3C68B71BF84}" type="slidenum">
               <a:rPr b="0" lang="en-US" sz="900" spc="-1" strike="noStrike">
                 <a:solidFill>
                   <a:schemeClr val="dk1"/>
@@ -13633,7 +14020,7 @@
               </a:lnSpc>
               <a:buNone/>
             </a:pPr>
-            <a:fld id="{86BFB4B7-ED10-4882-8BF9-B2767825D6BF}" type="slidenum">
+            <a:fld id="{C1524CD6-5D3F-4850-BFA3-DC316FF63A54}" type="slidenum">
               <a:rPr b="0" lang="en-US" sz="900" spc="-1" strike="noStrike">
                 <a:solidFill>
                   <a:schemeClr val="dk1"/>
@@ -14416,7 +14803,7 @@
         </p:nvSpPr>
         <p:spPr>
           <a:xfrm>
-            <a:off x="8549640" y="1627560"/>
+            <a:off x="8549640" y="1080000"/>
             <a:ext cx="2697120" cy="1416960"/>
           </a:xfrm>
           <a:prstGeom prst="rect">
@@ -14465,7 +14852,7 @@
         </p:nvSpPr>
         <p:spPr>
           <a:xfrm>
-            <a:off x="8677800" y="1719000"/>
+            <a:off x="8677800" y="1171440"/>
             <a:ext cx="2441160" cy="1252440"/>
           </a:xfrm>
           <a:prstGeom prst="rect">
@@ -14558,7 +14945,7 @@
         </p:nvSpPr>
         <p:spPr>
           <a:xfrm>
-            <a:off x="8549640" y="3337560"/>
+            <a:off x="8549640" y="2790000"/>
             <a:ext cx="2697120" cy="1298160"/>
           </a:xfrm>
           <a:prstGeom prst="rect">
@@ -14607,7 +14994,7 @@
         </p:nvSpPr>
         <p:spPr>
           <a:xfrm>
-            <a:off x="8677800" y="3520440"/>
+            <a:off x="8677800" y="2972880"/>
             <a:ext cx="2441160" cy="932400"/>
           </a:xfrm>
           <a:prstGeom prst="rect">
@@ -14777,7 +15164,7 @@
               </a:lnSpc>
               <a:buNone/>
             </a:pPr>
-            <a:fld id="{E5C2D80C-1FAC-42FE-9200-7BDC6B153EF3}" type="slidenum">
+            <a:fld id="{372082C1-1E33-4008-A46B-6B0842C41611}" type="slidenum">
               <a:rPr b="0" lang="en-US" sz="900" spc="-1" strike="noStrike">
                 <a:solidFill>
                   <a:schemeClr val="dk1"/>
@@ -14792,6 +15179,159 @@
                 <a:srgbClr val="000000"/>
               </a:solidFill>
               <a:latin typeface="Times New Roman"/>
+            </a:endParaRPr>
+          </a:p>
+        </p:txBody>
+      </p:sp>
+      <p:sp>
+        <p:nvSpPr>
+          <p:cNvPr id="170" name="Shape 1"/>
+          <p:cNvSpPr/>
+          <p:nvPr/>
+        </p:nvSpPr>
+        <p:spPr>
+          <a:xfrm>
+            <a:off x="8549640" y="4304160"/>
+            <a:ext cx="2697120" cy="1298160"/>
+          </a:xfrm>
+          <a:prstGeom prst="rect">
+            <a:avLst/>
+          </a:prstGeom>
+          <a:solidFill>
+            <a:srgbClr val="f5f7fa"/>
+          </a:solidFill>
+          <a:ln w="12700">
+            <a:solidFill>
+              <a:srgbClr val="d8dee7"/>
+            </a:solidFill>
+            <a:round/>
+          </a:ln>
+        </p:spPr>
+        <p:style>
+          <a:lnRef idx="0"/>
+          <a:fillRef idx="0"/>
+          <a:effectRef idx="0"/>
+          <a:fontRef idx="minor"/>
+        </p:style>
+        <p:txBody>
+          <a:bodyPr lIns="90000" rIns="90000" tIns="45000" bIns="45000" anchor="t">
+            <a:noAutofit/>
+          </a:bodyPr>
+          <a:p>
+            <a:endParaRPr b="0" lang="cs-CZ" sz="1800" spc="-1" strike="noStrike">
+              <a:solidFill>
+                <a:schemeClr val="dk1"/>
+              </a:solidFill>
+              <a:latin typeface="Aptos"/>
+            </a:endParaRPr>
+          </a:p>
+        </p:txBody>
+      </p:sp>
+      <p:sp>
+        <p:nvSpPr>
+          <p:cNvPr id="171" name="Text 15"/>
+          <p:cNvSpPr/>
+          <p:nvPr/>
+        </p:nvSpPr>
+        <p:spPr>
+          <a:xfrm>
+            <a:off x="8660160" y="4493160"/>
+            <a:ext cx="2441160" cy="932400"/>
+          </a:xfrm>
+          <a:prstGeom prst="rect">
+            <a:avLst/>
+          </a:prstGeom>
+          <a:noFill/>
+          <a:ln w="0">
+            <a:noFill/>
+          </a:ln>
+        </p:spPr>
+        <p:style>
+          <a:lnRef idx="0"/>
+          <a:fillRef idx="0"/>
+          <a:effectRef idx="0"/>
+          <a:fontRef idx="minor"/>
+        </p:style>
+        <p:txBody>
+          <a:bodyPr lIns="0" rIns="0" tIns="0" bIns="0" anchor="ctr">
+            <a:noAutofit/>
+          </a:bodyPr>
+          <a:p>
+            <a:pPr algn="ctr" defTabSz="914400">
+              <a:lnSpc>
+                <a:spcPct val="100000"/>
+              </a:lnSpc>
+              <a:tabLst>
+                <a:tab algn="l" pos="0"/>
+              </a:tabLst>
+            </a:pPr>
+            <a:r>
+              <a:rPr b="1" lang="cs-CZ" sz="1300" spc="-1" strike="noStrike">
+                <a:solidFill>
+                  <a:srgbClr val="202124"/>
+                </a:solidFill>
+                <a:latin typeface="Aptos"/>
+                <a:ea typeface="Aptos"/>
+              </a:rPr>
+              <a:t>Smazání hostingu</a:t>
+            </a:r>
+            <a:endParaRPr b="0" lang="cs-CZ" sz="1300" spc="-1" strike="noStrike">
+              <a:solidFill>
+                <a:srgbClr val="000000"/>
+              </a:solidFill>
+              <a:latin typeface="Arial"/>
+            </a:endParaRPr>
+          </a:p>
+          <a:p>
+            <a:pPr algn="ctr" defTabSz="914400">
+              <a:lnSpc>
+                <a:spcPct val="100000"/>
+              </a:lnSpc>
+              <a:tabLst>
+                <a:tab algn="l" pos="0"/>
+              </a:tabLst>
+            </a:pPr>
+            <a:r>
+              <a:rPr b="0" lang="cs-CZ" sz="1300" spc="-1" strike="noStrike">
+                <a:solidFill>
+                  <a:srgbClr val="202124"/>
+                </a:solidFill>
+                <a:latin typeface="Aptos"/>
+                <a:ea typeface="Aptos"/>
+              </a:rPr>
+              <a:t>  </a:t>
+            </a:r>
+            <a:endParaRPr b="0" lang="cs-CZ" sz="1300" spc="-1" strike="noStrike">
+              <a:solidFill>
+                <a:srgbClr val="000000"/>
+              </a:solidFill>
+              <a:latin typeface="Arial"/>
+            </a:endParaRPr>
+          </a:p>
+          <a:p>
+            <a:pPr defTabSz="914400">
+              <a:lnSpc>
+                <a:spcPct val="100000"/>
+              </a:lnSpc>
+              <a:tabLst>
+                <a:tab algn="l" pos="0"/>
+              </a:tabLst>
+            </a:pPr>
+            <a:r>
+              <a:rPr b="0" lang="en-US" sz="1300" spc="-1" strike="noStrike">
+                <a:solidFill>
+                  <a:srgbClr val="202124"/>
+                </a:solidFill>
+                <a:latin typeface="Aptos"/>
+                <a:ea typeface="Aptos"/>
+              </a:rPr>
+              <a:t>Panel také řeší situaci kdy by hosting byl potřeba smazat. V tom případě smaže ftp,databázi I klientské soubory</a:t>
+            </a:r>
+            <a:endParaRPr b="0" lang="cs-CZ" sz="1300" spc="-1" strike="noStrike">
+              <a:solidFill>
+                <a:srgbClr val="000000"/>
+              </a:solidFill>
+              <a:latin typeface="Arial"/>
             </a:endParaRPr>
           </a:p>
         </p:txBody>
@@ -14828,7 +15368,7 @@
       </p:grpSpPr>
       <p:sp>
         <p:nvSpPr>
-          <p:cNvPr id="170" name="Text 0"/>
+          <p:cNvPr id="172" name="Text 0"/>
           <p:cNvSpPr/>
           <p:nvPr/>
         </p:nvSpPr>
@@ -14885,7 +15425,7 @@
       </p:sp>
       <p:sp>
         <p:nvSpPr>
-          <p:cNvPr id="171" name="Shape 2"/>
+          <p:cNvPr id="173" name="Shape 2"/>
           <p:cNvSpPr/>
           <p:nvPr/>
         </p:nvSpPr>
@@ -14926,7 +15466,7 @@
       </p:sp>
       <p:sp>
         <p:nvSpPr>
-          <p:cNvPr id="172" name="Text 3"/>
+          <p:cNvPr id="174" name="Text 3"/>
           <p:cNvSpPr/>
           <p:nvPr/>
         </p:nvSpPr>
@@ -14983,7 +15523,7 @@
       </p:sp>
       <p:sp>
         <p:nvSpPr>
-          <p:cNvPr id="173" name="Text 4"/>
+          <p:cNvPr id="175" name="Text 4"/>
           <p:cNvSpPr/>
           <p:nvPr/>
         </p:nvSpPr>
@@ -15187,7 +15727,7 @@
       </p:sp>
       <p:sp>
         <p:nvSpPr>
-          <p:cNvPr id="174" name="Text 5"/>
+          <p:cNvPr id="176" name="Text 5"/>
           <p:cNvSpPr/>
           <p:nvPr/>
         </p:nvSpPr>
@@ -15244,7 +15784,7 @@
       </p:sp>
       <p:sp>
         <p:nvSpPr>
-          <p:cNvPr id="175" name="Text 6"/>
+          <p:cNvPr id="177" name="Text 6"/>
           <p:cNvSpPr/>
           <p:nvPr/>
         </p:nvSpPr>
@@ -15428,7 +15968,7 @@
       </p:sp>
       <p:sp>
         <p:nvSpPr>
-          <p:cNvPr id="176" name="PlaceHolder 1"/>
+          <p:cNvPr id="178" name="PlaceHolder 1"/>
           <p:cNvSpPr>
             <a:spLocks noGrp="1"/>
           </p:cNvSpPr>
@@ -15475,7 +16015,7 @@
               </a:lnSpc>
               <a:buNone/>
             </a:pPr>
-            <a:fld id="{31216779-4DA2-4E4F-86B3-B9C58C958E83}" type="slidenum">
+            <a:fld id="{66AEF97E-1B90-4DAB-B32F-19BA8BD412FB}" type="slidenum">
               <a:rPr b="0" lang="en-US" sz="900" spc="-1" strike="noStrike">
                 <a:solidFill>
                   <a:schemeClr val="dk1"/>
@@ -15526,7 +16066,7 @@
       </p:grpSpPr>
       <p:sp>
         <p:nvSpPr>
-          <p:cNvPr id="177" name="Text 0"/>
+          <p:cNvPr id="179" name="Text 0"/>
           <p:cNvSpPr/>
           <p:nvPr/>
         </p:nvSpPr>
@@ -15583,7 +16123,7 @@
       </p:sp>
       <p:sp>
         <p:nvSpPr>
-          <p:cNvPr id="178" name="Text 2"/>
+          <p:cNvPr id="180" name="Text 2"/>
           <p:cNvSpPr/>
           <p:nvPr/>
         </p:nvSpPr>
@@ -15640,7 +16180,7 @@
       </p:sp>
       <p:sp>
         <p:nvSpPr>
-          <p:cNvPr id="179" name="Text 3"/>
+          <p:cNvPr id="181" name="Text 3"/>
           <p:cNvSpPr/>
           <p:nvPr/>
         </p:nvSpPr>
@@ -15755,7 +16295,7 @@
       </p:sp>
       <p:sp>
         <p:nvSpPr>
-          <p:cNvPr id="180" name="Text 4"/>
+          <p:cNvPr id="182" name="Text 4"/>
           <p:cNvSpPr/>
           <p:nvPr/>
         </p:nvSpPr>
@@ -15812,7 +16352,7 @@
       </p:sp>
       <p:sp>
         <p:nvSpPr>
-          <p:cNvPr id="181" name="Text 5"/>
+          <p:cNvPr id="183" name="Text 5"/>
           <p:cNvSpPr/>
           <p:nvPr/>
         </p:nvSpPr>
@@ -15927,7 +16467,7 @@
       </p:sp>
       <p:sp>
         <p:nvSpPr>
-          <p:cNvPr id="182" name="Text 6"/>
+          <p:cNvPr id="184" name="Text 6"/>
           <p:cNvSpPr/>
           <p:nvPr/>
         </p:nvSpPr>
@@ -15984,7 +16524,7 @@
       </p:sp>
       <p:sp>
         <p:nvSpPr>
-          <p:cNvPr id="183" name="Text 7"/>
+          <p:cNvPr id="185" name="Text 7"/>
           <p:cNvSpPr/>
           <p:nvPr/>
         </p:nvSpPr>
@@ -16099,7 +16639,7 @@
       </p:sp>
       <p:sp>
         <p:nvSpPr>
-          <p:cNvPr id="184" name="Text 8"/>
+          <p:cNvPr id="186" name="Text 8"/>
           <p:cNvSpPr/>
           <p:nvPr/>
         </p:nvSpPr>
@@ -16156,7 +16696,7 @@
       </p:sp>
       <p:sp>
         <p:nvSpPr>
-          <p:cNvPr id="185" name="Text 9"/>
+          <p:cNvPr id="187" name="Text 9"/>
           <p:cNvSpPr/>
           <p:nvPr/>
         </p:nvSpPr>
@@ -16281,7 +16821,7 @@
       </p:sp>
       <p:sp>
         <p:nvSpPr>
-          <p:cNvPr id="186" name="PlaceHolder 1"/>
+          <p:cNvPr id="188" name="PlaceHolder 1"/>
           <p:cNvSpPr>
             <a:spLocks noGrp="1"/>
           </p:cNvSpPr>
@@ -16328,7 +16868,7 @@
               </a:lnSpc>
               <a:buNone/>
             </a:pPr>
-            <a:fld id="{19EC2CC3-765D-4F72-A290-3EA27DA75689}" type="slidenum">
+            <a:fld id="{2AF150E0-DC12-4203-9765-2DD89F4D5CFC}" type="slidenum">
               <a:rPr b="0" lang="en-US" sz="900" spc="-1" strike="noStrike">
                 <a:solidFill>
                   <a:schemeClr val="dk1"/>
@@ -16379,7 +16919,7 @@
       </p:grpSpPr>
       <p:sp>
         <p:nvSpPr>
-          <p:cNvPr id="187" name="Text 0"/>
+          <p:cNvPr id="189" name="Text 0"/>
           <p:cNvSpPr/>
           <p:nvPr/>
         </p:nvSpPr>
@@ -16436,7 +16976,7 @@
       </p:sp>
       <p:sp>
         <p:nvSpPr>
-          <p:cNvPr id="188" name="Text 2"/>
+          <p:cNvPr id="190" name="Text 2"/>
           <p:cNvSpPr/>
           <p:nvPr/>
         </p:nvSpPr>
@@ -16493,7 +17033,7 @@
       </p:sp>
       <p:sp>
         <p:nvSpPr>
-          <p:cNvPr id="189" name="Text 3"/>
+          <p:cNvPr id="191" name="Text 3"/>
           <p:cNvSpPr/>
           <p:nvPr/>
         </p:nvSpPr>
@@ -16686,7 +17226,7 @@
       </p:sp>
       <p:sp>
         <p:nvSpPr>
-          <p:cNvPr id="190" name="Text 4"/>
+          <p:cNvPr id="192" name="Text 4"/>
           <p:cNvSpPr/>
           <p:nvPr/>
         </p:nvSpPr>
@@ -16743,7 +17283,7 @@
       </p:sp>
       <p:sp>
         <p:nvSpPr>
-          <p:cNvPr id="191" name="PlaceHolder 1"/>
+          <p:cNvPr id="193" name="PlaceHolder 1"/>
           <p:cNvSpPr>
             <a:spLocks noGrp="1"/>
           </p:cNvSpPr>
@@ -16790,7 +17330,7 @@
               </a:lnSpc>
               <a:buNone/>
             </a:pPr>
-            <a:fld id="{B9F66485-CA6C-453E-AC9E-829A63D18AD3}" type="slidenum">
+            <a:fld id="{6A1B34C0-21B2-4A22-8229-3C9431A47499}" type="slidenum">
               <a:rPr b="0" lang="en-US" sz="900" spc="-1" strike="noStrike">
                 <a:solidFill>
                   <a:schemeClr val="dk1"/>
@@ -16811,7 +17351,7 @@
       </p:sp>
       <p:sp>
         <p:nvSpPr>
-          <p:cNvPr id="192" name="Text 3"/>
+          <p:cNvPr id="194" name="Text 3"/>
           <p:cNvSpPr/>
           <p:nvPr/>
         </p:nvSpPr>
@@ -17012,7 +17552,7 @@
       </p:grpSpPr>
       <p:sp>
         <p:nvSpPr>
-          <p:cNvPr id="193" name="Text 0"/>
+          <p:cNvPr id="195" name="Text 0"/>
           <p:cNvSpPr/>
           <p:nvPr/>
         </p:nvSpPr>
@@ -17069,7 +17609,7 @@
       </p:sp>
       <p:sp>
         <p:nvSpPr>
-          <p:cNvPr id="194" name="Text 1"/>
+          <p:cNvPr id="196" name="Text 1"/>
           <p:cNvSpPr/>
           <p:nvPr/>
         </p:nvSpPr>
@@ -17407,7 +17947,7 @@
       </p:sp>
       <p:sp>
         <p:nvSpPr>
-          <p:cNvPr id="195" name="PlaceHolder 1"/>
+          <p:cNvPr id="197" name="PlaceHolder 1"/>
           <p:cNvSpPr>
             <a:spLocks noGrp="1"/>
           </p:cNvSpPr>
@@ -17454,7 +17994,7 @@
               </a:lnSpc>
               <a:buNone/>
             </a:pPr>
-            <a:fld id="{CF2AA4B8-26AD-4F1C-BF19-EB77229D4E72}" type="slidenum">
+            <a:fld id="{5B0FAFF2-155D-471B-A56B-FAADBE87F2E3}" type="slidenum">
               <a:rPr b="0" lang="en-US" sz="900" spc="-1" strike="noStrike">
                 <a:solidFill>
                   <a:schemeClr val="dk1"/>
